--- a/classes/parte-9-forense-digital-y-respuesta-a-incidentes/206-analisis-de-artefactos-de-linux/clase-206-presentacion.pptx
+++ b/classes/parte-9-forense-digital-y-respuesta-a-incidentes/206-analisis-de-artefactos-de-linux/clase-206-presentacion.pptx
@@ -17,6 +17,11 @@
     <p:sldId id="265" r:id="rId16"/>
     <p:sldId id="266" r:id="rId17"/>
     <p:sldId id="267" r:id="rId18"/>
+    <p:sldId id="268" r:id="rId19"/>
+    <p:sldId id="269" r:id="rId20"/>
+    <p:sldId id="270" r:id="rId21"/>
+    <p:sldId id="271" r:id="rId22"/>
+    <p:sldId id="272" r:id="rId23"/>
   </p:sldIdLst>
   <p:sldSz cx="9144000" cy="6858000" type="screen4x3"/>
   <p:notesSz cx="6858000" cy="9144000"/>
@@ -3198,7 +3203,7 @@
                   <a:srgbClr val="0B3D2E"/>
                 </a:solidFill>
               </a:rPr>
-              <a:t>⚠️ Errores comunes</a:t>
+              <a:t>🧰 Herramientas y preparación</a:t>
             </a:r>
           </a:p>
         </p:txBody>
@@ -3236,67 +3241,37 @@
                   <a:srgbClr val="22282E"/>
                 </a:solidFill>
               </a:rPr>
-              <a:t>•  .bashhistory vacío — Atacante lo borró o usó unset HISTFILE. Busca en journald o timeline.</a:t>
-            </a:r>
-          </a:p>
-          <a:p>
-            <a:pPr>
-              <a:spcAft>
-                <a:spcPts val="600"/>
-              </a:spcAft>
-            </a:pPr>
-            <a:r>
-              <a:rPr sz="1500">
-                <a:solidFill>
-                  <a:srgbClr val="22282E"/>
-                </a:solidFill>
-              </a:rPr>
-              <a:t>•  journalctl no lee la carpeta — Falta --directory correcto o journal corrupto. Verifica la ruta.</a:t>
-            </a:r>
-          </a:p>
-          <a:p>
-            <a:pPr>
-              <a:spcAft>
-                <a:spcPts val="600"/>
-              </a:spcAft>
-            </a:pPr>
-            <a:r>
-              <a:rPr sz="1500">
-                <a:solidFill>
-                  <a:srgbClr val="22282E"/>
-                </a:solidFill>
-              </a:rPr>
-              <a:t>•  Timestamps alterados — El atacante usó touch. Contrasta con ctime y con logs.</a:t>
-            </a:r>
-          </a:p>
-          <a:p>
-            <a:pPr>
-              <a:spcAft>
-                <a:spcPts val="600"/>
-              </a:spcAft>
-            </a:pPr>
-            <a:r>
-              <a:rPr sz="1500">
-                <a:solidFill>
-                  <a:srgbClr val="22282E"/>
-                </a:solidFill>
-              </a:rPr>
-              <a:t>•  Montaste con exec — Riesgo de ejecutar malware. Usa siempre ro,noexec,nodev.</a:t>
-            </a:r>
-          </a:p>
-          <a:p>
-            <a:pPr>
-              <a:spcAft>
-                <a:spcPts val="600"/>
-              </a:spcAft>
-            </a:pPr>
-            <a:r>
-              <a:rPr sz="1500">
-                <a:solidFill>
-                  <a:srgbClr val="22282E"/>
-                </a:solidFill>
-              </a:rPr>
-              <a:t>•  No ves los logins — Logs rotados/comprimidos. Descomprime auth.log..gz.</a:t>
+              <a:t>•  Nativas: journalctl, last, lastb, grep, stat, ausearch (auditd).</a:t>
+            </a:r>
+          </a:p>
+          <a:p>
+            <a:pPr>
+              <a:spcAft>
+                <a:spcPts val="600"/>
+              </a:spcAft>
+            </a:pPr>
+            <a:r>
+              <a:rPr sz="1500">
+                <a:solidFill>
+                  <a:srgbClr val="22282E"/>
+                </a:solidFill>
+              </a:rPr>
+              <a:t>•  Análisis: The Sleuth Kit para montar la imagen, log2timeline/plaso para timeline.</a:t>
+            </a:r>
+          </a:p>
+          <a:p>
+            <a:pPr>
+              <a:spcAft>
+                <a:spcPts val="600"/>
+              </a:spcAft>
+            </a:pPr>
+            <a:r>
+              <a:rPr sz="1500">
+                <a:solidFill>
+                  <a:srgbClr val="22282E"/>
+                </a:solidFill>
+              </a:rPr>
+              <a:t>•  Entorno: usa una imagen de una VM Linux propia. Monta en solo lectura:</a:t>
             </a:r>
           </a:p>
         </p:txBody>
@@ -3347,7 +3322,7 @@
                   <a:srgbClr val="0B3D2E"/>
                 </a:solidFill>
               </a:rPr>
-              <a:t>❓ Preguntas frecuentes</a:t>
+              <a:t>🧪 Laboratorio guiado</a:t>
             </a:r>
           </a:p>
         </p:txBody>
@@ -3385,97 +3360,97 @@
                   <a:srgbClr val="22282E"/>
                 </a:solidFill>
               </a:rPr>
-              <a:t>•  ❓ ¿journald reemplaza a syslog?</a:t>
-            </a:r>
-          </a:p>
-          <a:p>
-            <a:pPr>
-              <a:spcAft>
-                <a:spcPts val="600"/>
-              </a:spcAft>
-            </a:pPr>
-            <a:r>
-              <a:rPr sz="1500">
-                <a:solidFill>
-                  <a:srgbClr val="22282E"/>
-                </a:solidFill>
-              </a:rPr>
-              <a:t>•  Coexisten. journald es el estándar en systemd; muchos sistemas también reenvían a syslog en texto.</a:t>
-            </a:r>
-          </a:p>
-          <a:p>
-            <a:pPr>
-              <a:spcAft>
-                <a:spcPts val="600"/>
-              </a:spcAft>
-            </a:pPr>
-            <a:r>
-              <a:rPr sz="1500">
-                <a:solidFill>
-                  <a:srgbClr val="22282E"/>
-                </a:solidFill>
-              </a:rPr>
-              <a:t>•  ❓ ¿El historial de shell tiene fechas?</a:t>
-            </a:r>
-          </a:p>
-          <a:p>
-            <a:pPr>
-              <a:spcAft>
-                <a:spcPts val="600"/>
-              </a:spcAft>
-            </a:pPr>
-            <a:r>
-              <a:rPr sz="1500">
-                <a:solidFill>
-                  <a:srgbClr val="22282E"/>
-                </a:solidFill>
-              </a:rPr>
-              <a:t>•  Solo si HISTTIMEFORMAT estaba configurado. Si no, tienes el orden pero no la hora exacta.</a:t>
-            </a:r>
-          </a:p>
-          <a:p>
-            <a:pPr>
-              <a:spcAft>
-                <a:spcPts val="600"/>
-              </a:spcAft>
-            </a:pPr>
-            <a:r>
-              <a:rPr sz="1500">
-                <a:solidFill>
-                  <a:srgbClr val="22282E"/>
-                </a:solidFill>
-              </a:rPr>
-              <a:t>•  ❓ ¿Cómo detecto persistencia?</a:t>
-            </a:r>
-          </a:p>
-          <a:p>
-            <a:pPr>
-              <a:spcAft>
-                <a:spcPts val="600"/>
-              </a:spcAft>
-            </a:pPr>
-            <a:r>
-              <a:rPr sz="1500">
-                <a:solidFill>
-                  <a:srgbClr val="22282E"/>
-                </a:solidFill>
-              </a:rPr>
-              <a:t>•  Revisa cron, systemd timers/services, rc.local, perfiles de shell, y authorizedkeys. Compara contra un baseline limpio.</a:t>
-            </a:r>
-          </a:p>
-          <a:p>
-            <a:pPr>
-              <a:spcAft>
-                <a:spcPts val="600"/>
-              </a:spcAft>
-            </a:pPr>
-            <a:r>
-              <a:rPr sz="1500">
-                <a:solidFill>
-                  <a:srgbClr val="22282E"/>
-                </a:solidFill>
-              </a:rPr>
-              <a:t>•  ❓ ¿ctime se puede falsificar?</a:t>
+              <a:t>•  Revisa autenticación (SSH, sudo):</a:t>
+            </a:r>
+          </a:p>
+          <a:p>
+            <a:pPr>
+              <a:spcAft>
+                <a:spcPts val="600"/>
+              </a:spcAft>
+            </a:pPr>
+            <a:r>
+              <a:rPr sz="1500">
+                <a:solidFill>
+                  <a:srgbClr val="22282E"/>
+                </a:solidFill>
+              </a:rPr>
+              <a:t>•  Lee logins con los registros binarios:</a:t>
+            </a:r>
+          </a:p>
+          <a:p>
+            <a:pPr>
+              <a:spcAft>
+                <a:spcPts val="600"/>
+              </a:spcAft>
+            </a:pPr>
+            <a:r>
+              <a:rPr sz="1500">
+                <a:solidFill>
+                  <a:srgbClr val="22282E"/>
+                </a:solidFill>
+              </a:rPr>
+              <a:t>•  Consulta journald offline:</a:t>
+            </a:r>
+          </a:p>
+          <a:p>
+            <a:pPr>
+              <a:spcAft>
+                <a:spcPts val="600"/>
+              </a:spcAft>
+            </a:pPr>
+            <a:r>
+              <a:rPr sz="1500">
+                <a:solidFill>
+                  <a:srgbClr val="22282E"/>
+                </a:solidFill>
+              </a:rPr>
+              <a:t>•  Extrae el historial de shell de cada usuario:</a:t>
+            </a:r>
+          </a:p>
+          <a:p>
+            <a:pPr>
+              <a:spcAft>
+                <a:spcPts val="600"/>
+              </a:spcAft>
+            </a:pPr>
+            <a:r>
+              <a:rPr sz="1500">
+                <a:solidFill>
+                  <a:srgbClr val="22282E"/>
+                </a:solidFill>
+              </a:rPr>
+              <a:t>•  Busca persistencia programada:</a:t>
+            </a:r>
+          </a:p>
+          <a:p>
+            <a:pPr>
+              <a:spcAft>
+                <a:spcPts val="600"/>
+              </a:spcAft>
+            </a:pPr>
+            <a:r>
+              <a:rPr sz="1500">
+                <a:solidFill>
+                  <a:srgbClr val="22282E"/>
+                </a:solidFill>
+              </a:rPr>
+              <a:t>•  Revisa cuentas y accesos sospechosos:</a:t>
+            </a:r>
+          </a:p>
+          <a:p>
+            <a:pPr>
+              <a:spcAft>
+                <a:spcPts val="600"/>
+              </a:spcAft>
+            </a:pPr>
+            <a:r>
+              <a:rPr sz="1500">
+                <a:solidFill>
+                  <a:srgbClr val="22282E"/>
+                </a:solidFill>
+              </a:rPr>
+              <a:t>•  Revisa persistencia en perfiles de shell:</a:t>
             </a:r>
           </a:p>
         </p:txBody>
@@ -3526,7 +3501,7 @@
                   <a:srgbClr val="0B3D2E"/>
                 </a:solidFill>
               </a:rPr>
-              <a:t>🔗 Referencias</a:t>
+              <a:t>✍️ Ejercicios</a:t>
             </a:r>
           </a:p>
         </p:txBody>
@@ -3564,56 +3539,757 @@
                   <a:srgbClr val="22282E"/>
                 </a:solidFill>
               </a:rPr>
-              <a:t>•  NIST SP 800-86: &lt;https://csrc.nist.gov/publications/detail/sp/800-86/final&gt;</a:t>
-            </a:r>
-          </a:p>
-          <a:p>
-            <a:pPr>
-              <a:spcAft>
-                <a:spcPts val="600"/>
-              </a:spcAft>
-            </a:pPr>
-            <a:r>
-              <a:rPr sz="1500">
-                <a:solidFill>
-                  <a:srgbClr val="22282E"/>
-                </a:solidFill>
-              </a:rPr>
-              <a:t>•  systemd journald docs: &lt;https://www.freedesktop.org/software/systemd/man/journalctl.html&gt;</a:t>
-            </a:r>
-          </a:p>
-          <a:p>
-            <a:pPr>
-              <a:spcAft>
-                <a:spcPts val="600"/>
-              </a:spcAft>
-            </a:pPr>
-            <a:r>
-              <a:rPr sz="1500">
-                <a:solidFill>
-                  <a:srgbClr val="22282E"/>
-                </a:solidFill>
-              </a:rPr>
-              <a:t>•  The Sleuth Kit: &lt;https://www.sleuthkit.org/&gt;</a:t>
-            </a:r>
-          </a:p>
-          <a:p>
-            <a:pPr>
-              <a:spcAft>
-                <a:spcPts val="600"/>
-              </a:spcAft>
-            </a:pPr>
-            <a:r>
-              <a:rPr sz="1500">
-                <a:solidFill>
-                  <a:srgbClr val="22282E"/>
-                </a:solidFill>
-              </a:rPr>
-              <a:t>•  SANS — Linux forensics resources: &lt;https://www.sans.org/blog/&gt;</a:t>
-            </a:r>
-          </a:p>
-        </p:txBody>
-      </p:sp>
+              <a:t>•  Extrae de auth.log todos los logins SSH exitosos y su IP de origen.</a:t>
+            </a:r>
+          </a:p>
+          <a:p>
+            <a:pPr>
+              <a:spcAft>
+                <a:spcPts val="600"/>
+              </a:spcAft>
+            </a:pPr>
+            <a:r>
+              <a:rPr sz="1500">
+                <a:solidFill>
+                  <a:srgbClr val="22282E"/>
+                </a:solidFill>
+              </a:rPr>
+              <a:t>•  Detecta un ataque de fuerza bruta contando fallos en btmp.</a:t>
+            </a:r>
+          </a:p>
+          <a:p>
+            <a:pPr>
+              <a:spcAft>
+                <a:spcPts val="600"/>
+              </a:spcAft>
+            </a:pPr>
+            <a:r>
+              <a:rPr sz="1500">
+                <a:solidFill>
+                  <a:srgbClr val="22282E"/>
+                </a:solidFill>
+              </a:rPr>
+              <a:t>•  Encuentra una tarea cron maliciosa que tú mismo plantaste.</a:t>
+            </a:r>
+          </a:p>
+          <a:p>
+            <a:pPr>
+              <a:spcAft>
+                <a:spcPts val="600"/>
+              </a:spcAft>
+            </a:pPr>
+            <a:r>
+              <a:rPr sz="1500">
+                <a:solidFill>
+                  <a:srgbClr val="22282E"/>
+                </a:solidFill>
+              </a:rPr>
+              <a:t>•  Identifica una cuenta con UID 0 distinta de root.</a:t>
+            </a:r>
+          </a:p>
+          <a:p>
+            <a:pPr>
+              <a:spcAft>
+                <a:spcPts val="600"/>
+              </a:spcAft>
+            </a:pPr>
+            <a:r>
+              <a:rPr sz="1500">
+                <a:solidFill>
+                  <a:srgbClr val="22282E"/>
+                </a:solidFill>
+              </a:rPr>
+              <a:t>•  Explica la diferencia entre atime, mtime y ctime.</a:t>
+            </a:r>
+          </a:p>
+          <a:p>
+            <a:pPr>
+              <a:spcAft>
+                <a:spcPts val="600"/>
+              </a:spcAft>
+            </a:pPr>
+            <a:r>
+              <a:rPr sz="1500">
+                <a:solidFill>
+                  <a:srgbClr val="22282E"/>
+                </a:solidFill>
+              </a:rPr>
+              <a:t>•  Reconstruye la secuencia de comandos de un usuario desde su historial.</a:t>
+            </a:r>
+          </a:p>
+        </p:txBody>
+      </p:sp>
+    </p:spTree>
+  </p:cSld>
+  <p:clrMapOvr>
+    <a:masterClrMapping/>
+  </p:clrMapOvr>
+</p:sld>
+</file>
+
+<file path=ppt/slides/slide13.xml><?xml version="1.0" encoding="utf-8"?>
+<p:sld xmlns:a="http://schemas.openxmlformats.org/drawingml/2006/main" xmlns:p="http://schemas.openxmlformats.org/presentationml/2006/main" xmlns:r="http://schemas.openxmlformats.org/officeDocument/2006/relationships">
+  <p:cSld>
+    <p:spTree>
+      <p:nvGrpSpPr>
+        <p:cNvPr id="1" name=""/>
+        <p:cNvGrpSpPr/>
+        <p:nvPr/>
+      </p:nvGrpSpPr>
+      <p:grpSpPr/>
+      <p:sp>
+        <p:nvSpPr>
+          <p:cNvPr id="2" name="TextBox 1"/>
+          <p:cNvSpPr txBox="1"/>
+          <p:nvPr/>
+        </p:nvSpPr>
+        <p:spPr>
+          <a:xfrm>
+            <a:off x="457200" y="320040"/>
+            <a:ext cx="8229600" cy="822960"/>
+          </a:xfrm>
+          <a:prstGeom prst="rect">
+            <a:avLst/>
+          </a:prstGeom>
+          <a:noFill/>
+        </p:spPr>
+        <p:txBody>
+          <a:bodyPr wrap="square">
+            <a:spAutoFit/>
+          </a:bodyPr>
+          <a:lstStyle/>
+          <a:p>
+            <a:r>
+              <a:rPr sz="2600" b="1">
+                <a:solidFill>
+                  <a:srgbClr val="0B3D2E"/>
+                </a:solidFill>
+              </a:rPr>
+              <a:t>📝 Reto verificable</a:t>
+            </a:r>
+          </a:p>
+        </p:txBody>
+      </p:sp>
+      <p:sp>
+        <p:nvSpPr>
+          <p:cNvPr id="3" name="TextBox 2"/>
+          <p:cNvSpPr txBox="1"/>
+          <p:nvPr/>
+        </p:nvSpPr>
+        <p:spPr>
+          <a:xfrm>
+            <a:off x="457200" y="1280160"/>
+            <a:ext cx="8229600" cy="4937760"/>
+          </a:xfrm>
+          <a:prstGeom prst="rect">
+            <a:avLst/>
+          </a:prstGeom>
+          <a:noFill/>
+        </p:spPr>
+        <p:txBody>
+          <a:bodyPr wrap="square">
+            <a:spAutoFit/>
+          </a:bodyPr>
+          <a:lstStyle/>
+          <a:p>
+            <a:pPr>
+              <a:spcAft>
+                <a:spcPts val="600"/>
+              </a:spcAft>
+            </a:pPr>
+            <a:r>
+              <a:rPr sz="1500">
+                <a:solidFill>
+                  <a:srgbClr val="22282E"/>
+                </a:solidFill>
+              </a:rPr>
+              <a:t>•  En una VM Linux propia, simula una intrusión (crea un usuario extra con UID 0, añade una clave SSH y un cron de persistencia) y luego, desde la imagen, detecta y documenta los tres mecanismos.</a:t>
+            </a:r>
+          </a:p>
+          <a:p>
+            <a:pPr>
+              <a:spcAft>
+                <a:spcPts val="600"/>
+              </a:spcAft>
+            </a:pPr>
+            <a:r>
+              <a:rPr sz="1500">
+                <a:solidFill>
+                  <a:srgbClr val="22282E"/>
+                </a:solidFill>
+              </a:rPr>
+              <a:t>•  Criterio de aceptación: tu informe identifica el usuario malicioso, la clave SSH añadida y la tarea de persistencia, cada uno con la ruta del artefacto, el timestamp relevante y el comando que lo…</a:t>
+            </a:r>
+          </a:p>
+        </p:txBody>
+      </p:sp>
+    </p:spTree>
+  </p:cSld>
+  <p:clrMapOvr>
+    <a:masterClrMapping/>
+  </p:clrMapOvr>
+</p:sld>
+</file>
+
+<file path=ppt/slides/slide14.xml><?xml version="1.0" encoding="utf-8"?>
+<p:sld xmlns:a="http://schemas.openxmlformats.org/drawingml/2006/main" xmlns:p="http://schemas.openxmlformats.org/presentationml/2006/main" xmlns:r="http://schemas.openxmlformats.org/officeDocument/2006/relationships">
+  <p:cSld>
+    <p:spTree>
+      <p:nvGrpSpPr>
+        <p:cNvPr id="1" name=""/>
+        <p:cNvGrpSpPr/>
+        <p:nvPr/>
+      </p:nvGrpSpPr>
+      <p:grpSpPr/>
+      <p:sp>
+        <p:nvSpPr>
+          <p:cNvPr id="2" name="TextBox 1"/>
+          <p:cNvSpPr txBox="1"/>
+          <p:nvPr/>
+        </p:nvSpPr>
+        <p:spPr>
+          <a:xfrm>
+            <a:off x="457200" y="320040"/>
+            <a:ext cx="8229600" cy="822960"/>
+          </a:xfrm>
+          <a:prstGeom prst="rect">
+            <a:avLst/>
+          </a:prstGeom>
+          <a:noFill/>
+        </p:spPr>
+        <p:txBody>
+          <a:bodyPr wrap="square">
+            <a:spAutoFit/>
+          </a:bodyPr>
+          <a:lstStyle/>
+          <a:p>
+            <a:r>
+              <a:rPr sz="2600" b="1">
+                <a:solidFill>
+                  <a:srgbClr val="0B3D2E"/>
+                </a:solidFill>
+              </a:rPr>
+              <a:t>⚠️ Errores comunes</a:t>
+            </a:r>
+          </a:p>
+        </p:txBody>
+      </p:sp>
+      <p:sp>
+        <p:nvSpPr>
+          <p:cNvPr id="3" name="TextBox 2"/>
+          <p:cNvSpPr txBox="1"/>
+          <p:nvPr/>
+        </p:nvSpPr>
+        <p:spPr>
+          <a:xfrm>
+            <a:off x="457200" y="1280160"/>
+            <a:ext cx="8229600" cy="4937760"/>
+          </a:xfrm>
+          <a:prstGeom prst="rect">
+            <a:avLst/>
+          </a:prstGeom>
+          <a:noFill/>
+        </p:spPr>
+        <p:txBody>
+          <a:bodyPr wrap="square">
+            <a:spAutoFit/>
+          </a:bodyPr>
+          <a:lstStyle/>
+          <a:p>
+            <a:pPr>
+              <a:spcAft>
+                <a:spcPts val="600"/>
+              </a:spcAft>
+            </a:pPr>
+            <a:r>
+              <a:rPr sz="1500">
+                <a:solidFill>
+                  <a:srgbClr val="22282E"/>
+                </a:solidFill>
+              </a:rPr>
+              <a:t>•  .bashhistory vacío — Atacante lo borró o usó unset HISTFILE. Busca en journald o timeline.</a:t>
+            </a:r>
+          </a:p>
+          <a:p>
+            <a:pPr>
+              <a:spcAft>
+                <a:spcPts val="600"/>
+              </a:spcAft>
+            </a:pPr>
+            <a:r>
+              <a:rPr sz="1500">
+                <a:solidFill>
+                  <a:srgbClr val="22282E"/>
+                </a:solidFill>
+              </a:rPr>
+              <a:t>•  journalctl no lee la carpeta — Falta --directory correcto o journal corrupto. Verifica la ruta.</a:t>
+            </a:r>
+          </a:p>
+          <a:p>
+            <a:pPr>
+              <a:spcAft>
+                <a:spcPts val="600"/>
+              </a:spcAft>
+            </a:pPr>
+            <a:r>
+              <a:rPr sz="1500">
+                <a:solidFill>
+                  <a:srgbClr val="22282E"/>
+                </a:solidFill>
+              </a:rPr>
+              <a:t>•  Timestamps alterados — El atacante usó touch. Contrasta con ctime y con logs.</a:t>
+            </a:r>
+          </a:p>
+          <a:p>
+            <a:pPr>
+              <a:spcAft>
+                <a:spcPts val="600"/>
+              </a:spcAft>
+            </a:pPr>
+            <a:r>
+              <a:rPr sz="1500">
+                <a:solidFill>
+                  <a:srgbClr val="22282E"/>
+                </a:solidFill>
+              </a:rPr>
+              <a:t>•  Montaste con exec — Riesgo de ejecutar malware. Usa siempre ro,noexec,nodev.</a:t>
+            </a:r>
+          </a:p>
+          <a:p>
+            <a:pPr>
+              <a:spcAft>
+                <a:spcPts val="600"/>
+              </a:spcAft>
+            </a:pPr>
+            <a:r>
+              <a:rPr sz="1500">
+                <a:solidFill>
+                  <a:srgbClr val="22282E"/>
+                </a:solidFill>
+              </a:rPr>
+              <a:t>•  No ves los logins — Logs rotados/comprimidos. Descomprime auth.log..gz.</a:t>
+            </a:r>
+          </a:p>
+        </p:txBody>
+      </p:sp>
+    </p:spTree>
+  </p:cSld>
+  <p:clrMapOvr>
+    <a:masterClrMapping/>
+  </p:clrMapOvr>
+</p:sld>
+</file>
+
+<file path=ppt/slides/slide15.xml><?xml version="1.0" encoding="utf-8"?>
+<p:sld xmlns:a="http://schemas.openxmlformats.org/drawingml/2006/main" xmlns:p="http://schemas.openxmlformats.org/presentationml/2006/main" xmlns:r="http://schemas.openxmlformats.org/officeDocument/2006/relationships">
+  <p:cSld>
+    <p:spTree>
+      <p:nvGrpSpPr>
+        <p:cNvPr id="1" name=""/>
+        <p:cNvGrpSpPr/>
+        <p:nvPr/>
+      </p:nvGrpSpPr>
+      <p:grpSpPr/>
+      <p:sp>
+        <p:nvSpPr>
+          <p:cNvPr id="2" name="TextBox 1"/>
+          <p:cNvSpPr txBox="1"/>
+          <p:nvPr/>
+        </p:nvSpPr>
+        <p:spPr>
+          <a:xfrm>
+            <a:off x="457200" y="320040"/>
+            <a:ext cx="8229600" cy="822960"/>
+          </a:xfrm>
+          <a:prstGeom prst="rect">
+            <a:avLst/>
+          </a:prstGeom>
+          <a:noFill/>
+        </p:spPr>
+        <p:txBody>
+          <a:bodyPr wrap="square">
+            <a:spAutoFit/>
+          </a:bodyPr>
+          <a:lstStyle/>
+          <a:p>
+            <a:r>
+              <a:rPr sz="2600" b="1">
+                <a:solidFill>
+                  <a:srgbClr val="0B3D2E"/>
+                </a:solidFill>
+              </a:rPr>
+              <a:t>❓ Preguntas frecuentes</a:t>
+            </a:r>
+          </a:p>
+        </p:txBody>
+      </p:sp>
+      <p:sp>
+        <p:nvSpPr>
+          <p:cNvPr id="3" name="TextBox 2"/>
+          <p:cNvSpPr txBox="1"/>
+          <p:nvPr/>
+        </p:nvSpPr>
+        <p:spPr>
+          <a:xfrm>
+            <a:off x="457200" y="1280160"/>
+            <a:ext cx="8229600" cy="4937760"/>
+          </a:xfrm>
+          <a:prstGeom prst="rect">
+            <a:avLst/>
+          </a:prstGeom>
+          <a:noFill/>
+        </p:spPr>
+        <p:txBody>
+          <a:bodyPr wrap="square">
+            <a:spAutoFit/>
+          </a:bodyPr>
+          <a:lstStyle/>
+          <a:p>
+            <a:pPr>
+              <a:spcAft>
+                <a:spcPts val="600"/>
+              </a:spcAft>
+            </a:pPr>
+            <a:r>
+              <a:rPr sz="1500">
+                <a:solidFill>
+                  <a:srgbClr val="22282E"/>
+                </a:solidFill>
+              </a:rPr>
+              <a:t>•  ❓ ¿journald reemplaza a syslog?</a:t>
+            </a:r>
+          </a:p>
+          <a:p>
+            <a:pPr>
+              <a:spcAft>
+                <a:spcPts val="600"/>
+              </a:spcAft>
+            </a:pPr>
+            <a:r>
+              <a:rPr sz="1500">
+                <a:solidFill>
+                  <a:srgbClr val="22282E"/>
+                </a:solidFill>
+              </a:rPr>
+              <a:t>•  Coexisten. journald es el estándar en systemd; muchos sistemas también reenvían a syslog en texto.</a:t>
+            </a:r>
+          </a:p>
+          <a:p>
+            <a:pPr>
+              <a:spcAft>
+                <a:spcPts val="600"/>
+              </a:spcAft>
+            </a:pPr>
+            <a:r>
+              <a:rPr sz="1500">
+                <a:solidFill>
+                  <a:srgbClr val="22282E"/>
+                </a:solidFill>
+              </a:rPr>
+              <a:t>•  ❓ ¿El historial de shell tiene fechas?</a:t>
+            </a:r>
+          </a:p>
+          <a:p>
+            <a:pPr>
+              <a:spcAft>
+                <a:spcPts val="600"/>
+              </a:spcAft>
+            </a:pPr>
+            <a:r>
+              <a:rPr sz="1500">
+                <a:solidFill>
+                  <a:srgbClr val="22282E"/>
+                </a:solidFill>
+              </a:rPr>
+              <a:t>•  Solo si HISTTIMEFORMAT estaba configurado. Si no, tienes el orden pero no la hora exacta.</a:t>
+            </a:r>
+          </a:p>
+          <a:p>
+            <a:pPr>
+              <a:spcAft>
+                <a:spcPts val="600"/>
+              </a:spcAft>
+            </a:pPr>
+            <a:r>
+              <a:rPr sz="1500">
+                <a:solidFill>
+                  <a:srgbClr val="22282E"/>
+                </a:solidFill>
+              </a:rPr>
+              <a:t>•  ❓ ¿Cómo detecto persistencia?</a:t>
+            </a:r>
+          </a:p>
+          <a:p>
+            <a:pPr>
+              <a:spcAft>
+                <a:spcPts val="600"/>
+              </a:spcAft>
+            </a:pPr>
+            <a:r>
+              <a:rPr sz="1500">
+                <a:solidFill>
+                  <a:srgbClr val="22282E"/>
+                </a:solidFill>
+              </a:rPr>
+              <a:t>•  Revisa cron, systemd timers/services, rc.local, perfiles de shell, y authorizedkeys. Compara contra un baseline limpio.</a:t>
+            </a:r>
+          </a:p>
+          <a:p>
+            <a:pPr>
+              <a:spcAft>
+                <a:spcPts val="600"/>
+              </a:spcAft>
+            </a:pPr>
+            <a:r>
+              <a:rPr sz="1500">
+                <a:solidFill>
+                  <a:srgbClr val="22282E"/>
+                </a:solidFill>
+              </a:rPr>
+              <a:t>•  ❓ ¿ctime se puede falsificar?</a:t>
+            </a:r>
+          </a:p>
+        </p:txBody>
+      </p:sp>
+    </p:spTree>
+  </p:cSld>
+  <p:clrMapOvr>
+    <a:masterClrMapping/>
+  </p:clrMapOvr>
+</p:sld>
+</file>
+
+<file path=ppt/slides/slide16.xml><?xml version="1.0" encoding="utf-8"?>
+<p:sld xmlns:a="http://schemas.openxmlformats.org/drawingml/2006/main" xmlns:p="http://schemas.openxmlformats.org/presentationml/2006/main" xmlns:r="http://schemas.openxmlformats.org/officeDocument/2006/relationships">
+  <p:cSld>
+    <p:spTree>
+      <p:nvGrpSpPr>
+        <p:cNvPr id="1" name=""/>
+        <p:cNvGrpSpPr/>
+        <p:nvPr/>
+      </p:nvGrpSpPr>
+      <p:grpSpPr/>
+      <p:sp>
+        <p:nvSpPr>
+          <p:cNvPr id="2" name="TextBox 1"/>
+          <p:cNvSpPr txBox="1"/>
+          <p:nvPr/>
+        </p:nvSpPr>
+        <p:spPr>
+          <a:xfrm>
+            <a:off x="457200" y="320040"/>
+            <a:ext cx="8229600" cy="822960"/>
+          </a:xfrm>
+          <a:prstGeom prst="rect">
+            <a:avLst/>
+          </a:prstGeom>
+          <a:noFill/>
+        </p:spPr>
+        <p:txBody>
+          <a:bodyPr wrap="square">
+            <a:spAutoFit/>
+          </a:bodyPr>
+          <a:lstStyle/>
+          <a:p>
+            <a:r>
+              <a:rPr sz="2600" b="1">
+                <a:solidFill>
+                  <a:srgbClr val="0B3D2E"/>
+                </a:solidFill>
+              </a:rPr>
+              <a:t>🔗 Referencias verificables y alcance</a:t>
+            </a:r>
+          </a:p>
+        </p:txBody>
+      </p:sp>
+      <p:sp>
+        <p:nvSpPr>
+          <p:cNvPr id="3" name="TextBox 2"/>
+          <p:cNvSpPr txBox="1"/>
+          <p:nvPr/>
+        </p:nvSpPr>
+        <p:spPr>
+          <a:xfrm>
+            <a:off x="457200" y="1280160"/>
+            <a:ext cx="8229600" cy="4937760"/>
+          </a:xfrm>
+          <a:prstGeom prst="rect">
+            <a:avLst/>
+          </a:prstGeom>
+          <a:noFill/>
+        </p:spPr>
+        <p:txBody>
+          <a:bodyPr wrap="square">
+            <a:spAutoFit/>
+          </a:bodyPr>
+          <a:lstStyle/>
+          <a:p>
+            <a:pPr>
+              <a:spcAft>
+                <a:spcPts val="600"/>
+              </a:spcAft>
+            </a:pPr>
+            <a:r>
+              <a:rPr sz="1500">
+                <a:solidFill>
+                  <a:srgbClr val="22282E"/>
+                </a:solidFill>
+              </a:rPr>
+              <a:t>•  NIST SP 800-86: fuente primaria del proceso de colección y análisis de datos de sistema operativo; no especifica artefactos de cada distribución actual — &lt;https://doi.org/10.6028/NIST.SP.800-86&gt;</a:t>
+            </a:r>
+          </a:p>
+          <a:p>
+            <a:pPr>
+              <a:spcAft>
+                <a:spcPts val="600"/>
+              </a:spcAft>
+            </a:pPr>
+            <a:r>
+              <a:rPr sz="1500">
+                <a:solidFill>
+                  <a:srgbClr val="22282E"/>
+                </a:solidFill>
+              </a:rPr>
+              <a:t>•  systemd journalctl: documentación oficial de filtros, boots, campos y verificación; la disponibilidad depende de versión y configuración —…</a:t>
+            </a:r>
+          </a:p>
+          <a:p>
+            <a:pPr>
+              <a:spcAft>
+                <a:spcPts val="600"/>
+              </a:spcAft>
+            </a:pPr>
+            <a:r>
+              <a:rPr sz="1500">
+                <a:solidFill>
+                  <a:srgbClr val="22282E"/>
+                </a:solidFill>
+              </a:rPr>
+              <a:t>•  systemd journald.conf: documentación oficial de almacenamiento, límites, forwarding y sellado — &lt;https://www.freedesktop.org/software/systemd/man/latest/journald.conf.html&gt;</a:t>
+            </a:r>
+          </a:p>
+          <a:p>
+            <a:pPr>
+              <a:spcAft>
+                <a:spcPts val="600"/>
+              </a:spcAft>
+            </a:pPr>
+            <a:r>
+              <a:rPr sz="1500">
+                <a:solidFill>
+                  <a:srgbClr val="22282E"/>
+                </a:solidFill>
+              </a:rPr>
+              <a:t>•  OpenSSH sshd: manual primario de AuthorizedKeysFile y opciones de autenticación — &lt;https://man.openbsd.org/sshdconfig&gt;</a:t>
+            </a:r>
+          </a:p>
+          <a:p>
+            <a:pPr>
+              <a:spcAft>
+                <a:spcPts val="600"/>
+              </a:spcAft>
+            </a:pPr>
+            <a:r>
+              <a:rPr sz="1500">
+                <a:solidFill>
+                  <a:srgbClr val="22282E"/>
+                </a:solidFill>
+              </a:rPr>
+              <a:t>•  Linux Kernel, ext4: fuente primaria para interpretar inodos y tiempos del filesystem usado en la clase — &lt;https://www.kernel.org/doc/html/latest/filesystems/ext4/index.html&gt;</a:t>
+            </a:r>
+          </a:p>
+          <a:p>
+            <a:pPr>
+              <a:spcAft>
+                <a:spcPts val="600"/>
+              </a:spcAft>
+            </a:pPr>
+            <a:r>
+              <a:rPr sz="1500">
+                <a:solidFill>
+                  <a:srgbClr val="22282E"/>
+                </a:solidFill>
+              </a:rPr>
+              <a:t>•  The Sleuth Kit: documentación primaria de análisis de filesystem — &lt;https://www.sleuthkit.org/sleuthkit/docs.php&gt;</a:t>
+            </a:r>
+          </a:p>
+        </p:txBody>
+      </p:sp>
+    </p:spTree>
+  </p:cSld>
+  <p:clrMapOvr>
+    <a:masterClrMapping/>
+  </p:clrMapOvr>
+</p:sld>
+</file>
+
+<file path=ppt/slides/slide17.xml><?xml version="1.0" encoding="utf-8"?>
+<p:sld xmlns:a="http://schemas.openxmlformats.org/drawingml/2006/main" xmlns:p="http://schemas.openxmlformats.org/presentationml/2006/main" xmlns:r="http://schemas.openxmlformats.org/officeDocument/2006/relationships">
+  <p:cSld>
+    <p:spTree>
+      <p:nvGrpSpPr>
+        <p:cNvPr id="1" name=""/>
+        <p:cNvGrpSpPr/>
+        <p:nvPr/>
+      </p:nvGrpSpPr>
+      <p:grpSpPr/>
+      <p:sp>
+        <p:nvSpPr>
+          <p:cNvPr id="2" name="TextBox 1"/>
+          <p:cNvSpPr txBox="1"/>
+          <p:nvPr/>
+        </p:nvSpPr>
+        <p:spPr>
+          <a:xfrm>
+            <a:off x="457200" y="274320"/>
+            <a:ext cx="8229600" cy="640080"/>
+          </a:xfrm>
+          <a:prstGeom prst="rect">
+            <a:avLst/>
+          </a:prstGeom>
+          <a:noFill/>
+        </p:spPr>
+        <p:txBody>
+          <a:bodyPr wrap="square">
+            <a:spAutoFit/>
+          </a:bodyPr>
+          <a:lstStyle/>
+          <a:p>
+            <a:r>
+              <a:rPr sz="2200" b="1">
+                <a:solidFill>
+                  <a:srgbClr val="0B3D2E"/>
+                </a:solidFill>
+              </a:rPr>
+              <a:t>Diagrama de la clase</a:t>
+            </a:r>
+          </a:p>
+        </p:txBody>
+      </p:sp>
+      <p:pic>
+        <p:nvPicPr>
+          <p:cNvPr id="3" name="Picture 2" descr="8e4dc012eef8de38.png"/>
+          <p:cNvPicPr>
+            <a:picLocks noChangeAspect="1"/>
+          </p:cNvPicPr>
+          <p:nvPr/>
+        </p:nvPicPr>
+        <p:blipFill>
+          <a:blip r:embed="rId2"/>
+          <a:stretch>
+            <a:fillRect/>
+          </a:stretch>
+        </p:blipFill>
+        <p:spPr>
+          <a:xfrm>
+            <a:off x="457200" y="1151827"/>
+            <a:ext cx="8229600" cy="5194425"/>
+          </a:xfrm>
+          <a:prstGeom prst="rect">
+            <a:avLst/>
+          </a:prstGeom>
+        </p:spPr>
+      </p:pic>
     </p:spTree>
   </p:cSld>
   <p:clrMapOvr>
@@ -3698,7 +4374,7 @@
                   <a:srgbClr val="22282E"/>
                 </a:solidFill>
               </a:rPr>
-              <a:t>•  Aprender dónde vive la evidencia en un sistema Linux comprometido: logs de sistema (syslog/journald), historial de shell, cron/systemd timers, cuentas y autenticación, y persistencia común de atacantes. Al terminar podrás reconstruir la actividad de un usuario y de un intruso en Linux.</a:t>
+              <a:t>•  Aprender dónde vive la evidencia en un sistema Linux comprometido: logs de sistema (syslog/journald), historial de shell, cron/systemd timers, cuentas y autenticación, y persistencia común de…</a:t>
             </a:r>
           </a:p>
         </p:txBody>
@@ -4092,7 +4768,7 @@
                   <a:srgbClr val="0B3D2E"/>
                 </a:solidFill>
               </a:rPr>
-              <a:t>📖 Definiciones y características</a:t>
+              <a:t>🧠 Explicación en profundidad</a:t>
             </a:r>
           </a:p>
         </p:txBody>
@@ -4130,97 +4806,97 @@
                   <a:srgbClr val="22282E"/>
                 </a:solidFill>
               </a:rPr>
-              <a:t>•  syslog: sistema clásico de logs de texto en /var/log. Característica: legible con herramientas estándar.</a:t>
-            </a:r>
-          </a:p>
-          <a:p>
-            <a:pPr>
-              <a:spcAft>
-                <a:spcPts val="600"/>
-              </a:spcAft>
-            </a:pPr>
-            <a:r>
-              <a:rPr sz="1500">
-                <a:solidFill>
-                  <a:srgbClr val="22282E"/>
-                </a:solidFill>
-              </a:rPr>
-              <a:t>•  journald: registro binario de systemd, se lee con journalctl. Característica: incluye metadatos ricos y es más difícil de manipular en texto plano.</a:t>
-            </a:r>
-          </a:p>
-          <a:p>
-            <a:pPr>
-              <a:spcAft>
-                <a:spcPts val="600"/>
-              </a:spcAft>
-            </a:pPr>
-            <a:r>
-              <a:rPr sz="1500">
-                <a:solidFill>
-                  <a:srgbClr val="22282E"/>
-                </a:solidFill>
-              </a:rPr>
-              <a:t>•  wtmp/btmp/lastlog: registros binarios de logins exitosos, fallidos y último acceso. Característica: se leen con last, lastb, lastlog.</a:t>
-            </a:r>
-          </a:p>
-          <a:p>
-            <a:pPr>
-              <a:spcAft>
-                <a:spcPts val="600"/>
-              </a:spcAft>
-            </a:pPr>
-            <a:r>
-              <a:rPr sz="1500">
-                <a:solidFill>
-                  <a:srgbClr val="22282E"/>
-                </a:solidFill>
-              </a:rPr>
-              <a:t>•  Historial de shell: ~/.bashhistory, ~/.zshhistory. Característica: puede tener timestamps si HISTTIMEFORMAT está activo.</a:t>
-            </a:r>
-          </a:p>
-          <a:p>
-            <a:pPr>
-              <a:spcAft>
-                <a:spcPts val="600"/>
-              </a:spcAft>
-            </a:pPr>
-            <a:r>
-              <a:rPr sz="1500">
-                <a:solidFill>
-                  <a:srgbClr val="22282E"/>
-                </a:solidFill>
-              </a:rPr>
-              <a:t>•  cron / systemd timer: tareas programadas. Característica: vías comunes de persistencia.</a:t>
-            </a:r>
-          </a:p>
-          <a:p>
-            <a:pPr>
-              <a:spcAft>
-                <a:spcPts val="600"/>
-              </a:spcAft>
-            </a:pPr>
-            <a:r>
-              <a:rPr sz="1500">
-                <a:solidFill>
-                  <a:srgbClr val="22282E"/>
-                </a:solidFill>
-              </a:rPr>
-              <a:t>•  authorizedkeys: claves SSH que permiten acceso sin contraseña. Característica: una clave añadida es señal de backdoor.</a:t>
-            </a:r>
-          </a:p>
-          <a:p>
-            <a:pPr>
-              <a:spcAft>
-                <a:spcPts val="600"/>
-              </a:spcAft>
-            </a:pPr>
-            <a:r>
-              <a:rPr sz="1500">
-                <a:solidFill>
-                  <a:srgbClr val="22282E"/>
-                </a:solidFill>
-              </a:rPr>
-              <a:t>•  stat: muestra timestamps atime/mtime/ctime de un archivo. Característica: base del timeline en Linux.</a:t>
+              <a:t>•  Linux no ofrece un conjunto único de artefactos: distribución, init, filesystem, auditoría, shell y rotación cambian lo disponible. systemd-journald puede usar almacenamiento volátil o persistente…</a:t>
+            </a:r>
+          </a:p>
+          <a:p>
+            <a:pPr>
+              <a:spcAft>
+                <a:spcPts val="600"/>
+              </a:spcAft>
+            </a:pPr>
+            <a:r>
+              <a:rPr sz="1500">
+                <a:solidFill>
+                  <a:srgbClr val="22282E"/>
+                </a:solidFill>
+              </a:rPr>
+              <a:t>•  Se documentan zona horaria, boot ID, hostname y rotaciones antes de ordenar. Un servicio persistente puede aparecer en unit files, symlinks y journal; una cuenta en passwd, shadow, sudoers y logs.…</a:t>
+            </a:r>
+          </a:p>
+          <a:p>
+            <a:pPr>
+              <a:spcAft>
+                <a:spcPts val="600"/>
+              </a:spcAft>
+            </a:pPr>
+            <a:r>
+              <a:rPr sz="1500">
+                <a:solidFill>
+                  <a:srgbClr val="22282E"/>
+                </a:solidFill>
+              </a:rPr>
+              <a:t>•  systemd-journald añade campos como unidad, PID, UID, boot ID y transporte. Puede almacenar en /run/log/journal y perderse al reiniciar, o persistir en /var/log/journal, según configuración.…</a:t>
+            </a:r>
+          </a:p>
+          <a:p>
+            <a:pPr>
+              <a:spcAft>
+                <a:spcPts val="600"/>
+              </a:spcAft>
+            </a:pPr>
+            <a:r>
+              <a:rPr sz="1500">
+                <a:solidFill>
+                  <a:srgbClr val="22282E"/>
+                </a:solidFill>
+              </a:rPr>
+              <a:t>•  Syslog y logs de aplicaciones pueden coexistir, duplicarse o reenviarse. Antes de correlacionar se identifica quién originó el mensaje, quién lo escribió y qué regla lo rotó. Un hueco puede…</a:t>
+            </a:r>
+          </a:p>
+          <a:p>
+            <a:pPr>
+              <a:spcAft>
+                <a:spcPts val="600"/>
+              </a:spcAft>
+            </a:pPr>
+            <a:r>
+              <a:rPr sz="1500">
+                <a:solidFill>
+                  <a:srgbClr val="22282E"/>
+                </a:solidFill>
+              </a:rPr>
+              <a:t>•  auth.log o secure depende de la familia de distribución; wtmp y btmp registran sesiones en estructuras binarias, no intención ni todos los comandos. sudo puede producir una línea por ejecución según…</a:t>
+            </a:r>
+          </a:p>
+          <a:p>
+            <a:pPr>
+              <a:spcAft>
+                <a:spcPts val="600"/>
+              </a:spcAft>
+            </a:pPr>
+            <a:r>
+              <a:rPr sz="1500">
+                <a:solidFill>
+                  <a:srgbClr val="22282E"/>
+                </a:solidFill>
+              </a:rPr>
+              <a:t>•  El historial de shell se escribe según shell y opciones. Bash puede mantener comandos en memoria hasta el cierre; timestamps dependen de HISTTIMEFORMAT y el archivo puede truncarse. Por ello un…</a:t>
+            </a:r>
+          </a:p>
+          <a:p>
+            <a:pPr>
+              <a:spcAft>
+                <a:spcPts val="600"/>
+              </a:spcAft>
+            </a:pPr>
+            <a:r>
+              <a:rPr sz="1500">
+                <a:solidFill>
+                  <a:srgbClr val="22282E"/>
+                </a:solidFill>
+              </a:rPr>
+              <a:t>•  Cron, timers, units, scripts de inicio, claves authorizedkeys, perfiles y cargadores dinámicos pueden iniciar código. La detección no consiste en buscar solo nombres extraños: se identifica qué…</a:t>
             </a:r>
           </a:p>
         </p:txBody>
@@ -4271,7 +4947,7 @@
                   <a:srgbClr val="0B3D2E"/>
                 </a:solidFill>
               </a:rPr>
-              <a:t>🧰 Herramientas y preparación</a:t>
+              <a:t>📔 Glosario</a:t>
             </a:r>
           </a:p>
         </p:txBody>
@@ -4309,52 +4985,97 @@
                   <a:srgbClr val="22282E"/>
                 </a:solidFill>
               </a:rPr>
-              <a:t>•  Nativas: journalctl, last, lastb, grep, stat, ausearch (auditd).</a:t>
-            </a:r>
-          </a:p>
-          <a:p>
-            <a:pPr>
-              <a:spcAft>
-                <a:spcPts val="600"/>
-              </a:spcAft>
-            </a:pPr>
-            <a:r>
-              <a:rPr sz="1500">
-                <a:solidFill>
-                  <a:srgbClr val="22282E"/>
-                </a:solidFill>
-              </a:rPr>
-              <a:t>•  Análisis: The Sleuth Kit para montar la imagen, log2timeline/plaso para timeline.</a:t>
-            </a:r>
-          </a:p>
-          <a:p>
-            <a:pPr>
-              <a:spcAft>
-                <a:spcPts val="600"/>
-              </a:spcAft>
-            </a:pPr>
-            <a:r>
-              <a:rPr sz="1500">
-                <a:solidFill>
-                  <a:srgbClr val="22282E"/>
-                </a:solidFill>
-              </a:rPr>
-              <a:t>•  Entorno: usa una imagen de una VM Linux propia. Monta en solo lectura:</a:t>
-            </a:r>
-          </a:p>
-          <a:p>
-            <a:pPr>
-              <a:spcAft>
-                <a:spcPts val="600"/>
-              </a:spcAft>
-            </a:pPr>
-            <a:r>
-              <a:rPr sz="1500">
-                <a:solidFill>
-                  <a:srgbClr val="22282E"/>
-                </a:solidFill>
-              </a:rPr>
-              <a:t>•  mount -o ro,noexec,nodev imagen.dd /mnt/evidencia</a:t>
+              <a:t>•  journald: servicio de eventos de systemd.</a:t>
+            </a:r>
+          </a:p>
+          <a:p>
+            <a:pPr>
+              <a:spcAft>
+                <a:spcPts val="600"/>
+              </a:spcAft>
+            </a:pPr>
+            <a:r>
+              <a:rPr sz="1500">
+                <a:solidFill>
+                  <a:srgbClr val="22282E"/>
+                </a:solidFill>
+              </a:rPr>
+              <a:t>•  auditd: subsistema de auditoría de Linux.</a:t>
+            </a:r>
+          </a:p>
+          <a:p>
+            <a:pPr>
+              <a:spcAft>
+                <a:spcPts val="600"/>
+              </a:spcAft>
+            </a:pPr>
+            <a:r>
+              <a:rPr sz="1500">
+                <a:solidFill>
+                  <a:srgbClr val="22282E"/>
+                </a:solidFill>
+              </a:rPr>
+              <a:t>•  Unit file: definición de servicio o temporizador systemd.</a:t>
+            </a:r>
+          </a:p>
+          <a:p>
+            <a:pPr>
+              <a:spcAft>
+                <a:spcPts val="600"/>
+              </a:spcAft>
+            </a:pPr>
+            <a:r>
+              <a:rPr sz="1500">
+                <a:solidFill>
+                  <a:srgbClr val="22282E"/>
+                </a:solidFill>
+              </a:rPr>
+              <a:t>•  Cron: programación tradicional de tareas.</a:t>
+            </a:r>
+          </a:p>
+          <a:p>
+            <a:pPr>
+              <a:spcAft>
+                <a:spcPts val="600"/>
+              </a:spcAft>
+            </a:pPr>
+            <a:r>
+              <a:rPr sz="1500">
+                <a:solidFill>
+                  <a:srgbClr val="22282E"/>
+                </a:solidFill>
+              </a:rPr>
+              <a:t>•  /proc: vista efímera del kernel y procesos.</a:t>
+            </a:r>
+          </a:p>
+          <a:p>
+            <a:pPr>
+              <a:spcAft>
+                <a:spcPts val="600"/>
+              </a:spcAft>
+            </a:pPr>
+            <a:r>
+              <a:rPr sz="1500">
+                <a:solidFill>
+                  <a:srgbClr val="22282E"/>
+                </a:solidFill>
+              </a:rPr>
+              <a:t>•  Log rotation: archivado y reemplazo periódico de logs.</a:t>
+            </a:r>
+          </a:p>
+          <a:p>
+            <a:pPr>
+              <a:spcAft>
+                <a:spcPts val="600"/>
+              </a:spcAft>
+            </a:pPr>
+            <a:r>
+              <a:rPr sz="1500">
+                <a:solidFill>
+                  <a:srgbClr val="22282E"/>
+                </a:solidFill>
+              </a:rPr>
+              <a:t>•  Boot ID: identificador de arranque para contextualizar eventos.</a:t>
             </a:r>
           </a:p>
         </p:txBody>
@@ -4405,7 +5126,7 @@
                   <a:srgbClr val="0B3D2E"/>
                 </a:solidFill>
               </a:rPr>
-              <a:t>🧪 Laboratorio guiado</a:t>
+              <a:t>📖 Definiciones y características</a:t>
             </a:r>
           </a:p>
         </p:txBody>
@@ -4443,97 +5164,97 @@
                   <a:srgbClr val="22282E"/>
                 </a:solidFill>
               </a:rPr>
-              <a:t>•  Revisa autenticación (SSH, sudo):</a:t>
-            </a:r>
-          </a:p>
-          <a:p>
-            <a:pPr>
-              <a:spcAft>
-                <a:spcPts val="600"/>
-              </a:spcAft>
-            </a:pPr>
-            <a:r>
-              <a:rPr sz="1500">
-                <a:solidFill>
-                  <a:srgbClr val="22282E"/>
-                </a:solidFill>
-              </a:rPr>
-              <a:t>•  grep -Ei "accepted|failed|sudo" /mnt/evidencia/var/log/auth.log</a:t>
-            </a:r>
-          </a:p>
-          <a:p>
-            <a:pPr>
-              <a:spcAft>
-                <a:spcPts val="600"/>
-              </a:spcAft>
-            </a:pPr>
-            <a:r>
-              <a:rPr sz="1500">
-                <a:solidFill>
-                  <a:srgbClr val="22282E"/>
-                </a:solidFill>
-              </a:rPr>
-              <a:t>•  Lee logins con los registros binarios:</a:t>
-            </a:r>
-          </a:p>
-          <a:p>
-            <a:pPr>
-              <a:spcAft>
-                <a:spcPts val="600"/>
-              </a:spcAft>
-            </a:pPr>
-            <a:r>
-              <a:rPr sz="1500">
-                <a:solidFill>
-                  <a:srgbClr val="22282E"/>
-                </a:solidFill>
-              </a:rPr>
-              <a:t>•  last -f /mnt/evidencia/var/log/wtmp</a:t>
-            </a:r>
-          </a:p>
-          <a:p>
-            <a:pPr>
-              <a:spcAft>
-                <a:spcPts val="600"/>
-              </a:spcAft>
-            </a:pPr>
-            <a:r>
-              <a:rPr sz="1500">
-                <a:solidFill>
-                  <a:srgbClr val="22282E"/>
-                </a:solidFill>
-              </a:rPr>
-              <a:t>•  lastb -f /mnt/evidencia/var/log/btmp</a:t>
-            </a:r>
-          </a:p>
-          <a:p>
-            <a:pPr>
-              <a:spcAft>
-                <a:spcPts val="600"/>
-              </a:spcAft>
-            </a:pPr>
-            <a:r>
-              <a:rPr sz="1500">
-                <a:solidFill>
-                  <a:srgbClr val="22282E"/>
-                </a:solidFill>
-              </a:rPr>
-              <a:t>•  Consulta journald offline:</a:t>
-            </a:r>
-          </a:p>
-          <a:p>
-            <a:pPr>
-              <a:spcAft>
-                <a:spcPts val="600"/>
-              </a:spcAft>
-            </a:pPr>
-            <a:r>
-              <a:rPr sz="1500">
-                <a:solidFill>
-                  <a:srgbClr val="22282E"/>
-                </a:solidFill>
-              </a:rPr>
-              <a:t>•  journalctl --directory=/mnt/evidencia/var/log/journal --no-pager</a:t>
+              <a:t>•  syslog: sistema clásico de logs de texto en /var/log. Característica: legible con herramientas estándar.</a:t>
+            </a:r>
+          </a:p>
+          <a:p>
+            <a:pPr>
+              <a:spcAft>
+                <a:spcPts val="600"/>
+              </a:spcAft>
+            </a:pPr>
+            <a:r>
+              <a:rPr sz="1500">
+                <a:solidFill>
+                  <a:srgbClr val="22282E"/>
+                </a:solidFill>
+              </a:rPr>
+              <a:t>•  journald: servicio de journal de systemd, consultado con journalctl. Característica: añade metadatos estructurados, pero su persistencia, sellado y retención dependen de configuración.</a:t>
+            </a:r>
+          </a:p>
+          <a:p>
+            <a:pPr>
+              <a:spcAft>
+                <a:spcPts val="600"/>
+              </a:spcAft>
+            </a:pPr>
+            <a:r>
+              <a:rPr sz="1500">
+                <a:solidFill>
+                  <a:srgbClr val="22282E"/>
+                </a:solidFill>
+              </a:rPr>
+              <a:t>•  wtmp/btmp/lastlog: registros binarios de logins exitosos, fallidos y último acceso. Característica: se leen con last, lastb, lastlog.</a:t>
+            </a:r>
+          </a:p>
+          <a:p>
+            <a:pPr>
+              <a:spcAft>
+                <a:spcPts val="600"/>
+              </a:spcAft>
+            </a:pPr>
+            <a:r>
+              <a:rPr sz="1500">
+                <a:solidFill>
+                  <a:srgbClr val="22282E"/>
+                </a:solidFill>
+              </a:rPr>
+              <a:t>•  Historial de shell: archivos como ~/.bashhistory o ~/.zshhistory. Característica: escritura y timestamps dependen del shell, opciones y cierre de sesión.</a:t>
+            </a:r>
+          </a:p>
+          <a:p>
+            <a:pPr>
+              <a:spcAft>
+                <a:spcPts val="600"/>
+              </a:spcAft>
+            </a:pPr>
+            <a:r>
+              <a:rPr sz="1500">
+                <a:solidFill>
+                  <a:srgbClr val="22282E"/>
+                </a:solidFill>
+              </a:rPr>
+              <a:t>•  cron / systemd timer: tareas programadas. Característica: vías comunes de persistencia.</a:t>
+            </a:r>
+          </a:p>
+          <a:p>
+            <a:pPr>
+              <a:spcAft>
+                <a:spcPts val="600"/>
+              </a:spcAft>
+            </a:pPr>
+            <a:r>
+              <a:rPr sz="1500">
+                <a:solidFill>
+                  <a:srgbClr val="22282E"/>
+                </a:solidFill>
+              </a:rPr>
+              <a:t>•  authorizedkeys: claves públicas autorizadas para autenticación SSH, sujetas a opciones y política del servidor. Característica: una adición no autorizada puede crear persistencia, pero una clave…</a:t>
+            </a:r>
+          </a:p>
+          <a:p>
+            <a:pPr>
+              <a:spcAft>
+                <a:spcPts val="600"/>
+              </a:spcAft>
+            </a:pPr>
+            <a:r>
+              <a:rPr sz="1500">
+                <a:solidFill>
+                  <a:srgbClr val="22282E"/>
+                </a:solidFill>
+              </a:rPr>
+              <a:t>•  stat: muestra timestamps atime/mtime/ctime de un archivo. Característica: base del timeline en Linux.</a:t>
             </a:r>
           </a:p>
         </p:txBody>
@@ -4584,7 +5305,7 @@
                   <a:srgbClr val="0B3D2E"/>
                 </a:solidFill>
               </a:rPr>
-              <a:t>✍️ Ejercicios</a:t>
+              <a:t>🔍 Caso razonado — persistencia después de un acceso SSH</a:t>
             </a:r>
           </a:p>
         </p:txBody>
@@ -4622,82 +5343,22 @@
                   <a:srgbClr val="22282E"/>
                 </a:solidFill>
               </a:rPr>
-              <a:t>•  Extrae de auth.log todos los logins SSH exitosos y su IP de origen.</a:t>
-            </a:r>
-          </a:p>
-          <a:p>
-            <a:pPr>
-              <a:spcAft>
-                <a:spcPts val="600"/>
-              </a:spcAft>
-            </a:pPr>
-            <a:r>
-              <a:rPr sz="1500">
-                <a:solidFill>
-                  <a:srgbClr val="22282E"/>
-                </a:solidFill>
-              </a:rPr>
-              <a:t>•  Detecta un ataque de fuerza bruta contando fallos en btmp.</a:t>
-            </a:r>
-          </a:p>
-          <a:p>
-            <a:pPr>
-              <a:spcAft>
-                <a:spcPts val="600"/>
-              </a:spcAft>
-            </a:pPr>
-            <a:r>
-              <a:rPr sz="1500">
-                <a:solidFill>
-                  <a:srgbClr val="22282E"/>
-                </a:solidFill>
-              </a:rPr>
-              <a:t>•  Encuentra una tarea cron maliciosa que tú mismo plantaste.</a:t>
-            </a:r>
-          </a:p>
-          <a:p>
-            <a:pPr>
-              <a:spcAft>
-                <a:spcPts val="600"/>
-              </a:spcAft>
-            </a:pPr>
-            <a:r>
-              <a:rPr sz="1500">
-                <a:solidFill>
-                  <a:srgbClr val="22282E"/>
-                </a:solidFill>
-              </a:rPr>
-              <a:t>•  Identifica una cuenta con UID 0 distinta de root.</a:t>
-            </a:r>
-          </a:p>
-          <a:p>
-            <a:pPr>
-              <a:spcAft>
-                <a:spcPts val="600"/>
-              </a:spcAft>
-            </a:pPr>
-            <a:r>
-              <a:rPr sz="1500">
-                <a:solidFill>
-                  <a:srgbClr val="22282E"/>
-                </a:solidFill>
-              </a:rPr>
-              <a:t>•  Explica la diferencia entre atime, mtime y ctime.</a:t>
-            </a:r>
-          </a:p>
-          <a:p>
-            <a:pPr>
-              <a:spcAft>
-                <a:spcPts val="600"/>
-              </a:spcAft>
-            </a:pPr>
-            <a:r>
-              <a:rPr sz="1500">
-                <a:solidFill>
-                  <a:srgbClr val="22282E"/>
-                </a:solidFill>
-              </a:rPr>
-              <a:t>•  Reconstruye la secuencia de comandos de un usuario desde su historial.</a:t>
+              <a:t>•  Una cuenta de despliegue inicia sesión desde una IP no habitual. journalctl y auth.log coinciden en usuario y origen; wtmp confirma una sesión, pero no sus comandos. El inode y stat muestran cambio…</a:t>
+            </a:r>
+          </a:p>
+          <a:p>
+            <a:pPr>
+              <a:spcAft>
+                <a:spcPts val="600"/>
+              </a:spcAft>
+            </a:pPr>
+            <a:r>
+              <a:rPr sz="1500">
+                <a:solidFill>
+                  <a:srgbClr val="22282E"/>
+                </a:solidFill>
+              </a:rPr>
+              <a:t>•  La hipótesis se fortalece por la secuencia, no por una clave aislada. Se conserva el boot ID, se verifica zona y se compara la clave con el inventario. Si el historial está vacío, el informe no…</a:t>
             </a:r>
           </a:p>
         </p:txBody>
@@ -4748,7 +5409,7 @@
                   <a:srgbClr val="0B3D2E"/>
                 </a:solidFill>
               </a:rPr>
-              <a:t>📝 Reto verificable</a:t>
+              <a:t>✅ Criterio de dominio</a:t>
             </a:r>
           </a:p>
         </p:txBody>
@@ -4786,22 +5447,7 @@
                   <a:srgbClr val="22282E"/>
                 </a:solidFill>
               </a:rPr>
-              <a:t>•  En una VM Linux propia, simula una intrusión (crea un usuario extra con UID 0, añade una clave SSH y un cron de persistencia) y luego, desde la imagen, detecta y documenta los tres mecanismos.</a:t>
-            </a:r>
-          </a:p>
-          <a:p>
-            <a:pPr>
-              <a:spcAft>
-                <a:spcPts val="600"/>
-              </a:spcAft>
-            </a:pPr>
-            <a:r>
-              <a:rPr sz="1500">
-                <a:solidFill>
-                  <a:srgbClr val="22282E"/>
-                </a:solidFill>
-              </a:rPr>
-              <a:t>•  Criterio de aceptación: tu informe identifica el usuario malicioso, la clave SSH añadida y la tarea de persistencia, cada uno con la ruta del artefacto, el timestamp relevante y el comando que lo reveló.</a:t>
+              <a:t>•  El alumno correlaciona al menos una fuente de autenticación, una de ejecución/persistencia y una de filesystem; explica rotación, boot ID y límites del historial; y distingue cambio observado de…</a:t>
             </a:r>
           </a:p>
         </p:txBody>
